--- a/dist/files/ai-tools-getting-started.pptx
+++ b/dist/files/ai-tools-getting-started.pptx
@@ -3321,7 +3321,7 @@
                 <a:ea typeface="Calibri" pitchFamily="34" charset="-122"/>
                 <a:cs typeface="Calibri" pitchFamily="34" charset="-120"/>
               </a:rPr>
-              <a:t>When in doubt - do not paste it. Check the Restricted Data Reference Guide or ask Adam first.</a:t>
+              <a:t>When in doubt - do not paste it. Check the Restricted Data Reference Guide or ask Adam first. Connecting a tool to another system? Ask IT first.</a:t>
             </a:r>
             <a:endParaRPr lang="en-US" sz="1250" dirty="0"/>
           </a:p>
@@ -5057,7 +5057,7 @@
                 <a:ea typeface="Calibri" pitchFamily="34" charset="-122"/>
                 <a:cs typeface="Calibri" pitchFamily="34" charset="-120"/>
               </a:rPr>
-              <a:t>Quick Reference Card coming to your inbox from Adam. Keep it handy for the first week.</a:t>
+              <a:t>Quick Reference Card lives on the Training Hub, in the header. Keep it open for the first week.</a:t>
             </a:r>
             <a:endParaRPr lang="en-US" sz="1150" dirty="0"/>
           </a:p>
@@ -7649,7 +7649,7 @@
                 <a:ea typeface="Calibri" pitchFamily="34" charset="-122"/>
                 <a:cs typeface="Calibri" pitchFamily="34" charset="-120"/>
               </a:rPr>
-              <a:t>Use Sonnet - not Opus. Sonnet is the right model for this team.</a:t>
+              <a:t>Sonnet for almost everything - it is faster. Opus thinks longer, so save it for the hard ones.</a:t>
             </a:r>
             <a:endParaRPr lang="en-US" sz="1000" dirty="0"/>
           </a:p>
@@ -9381,7 +9381,7 @@
                 <a:ea typeface="Calibri" pitchFamily="34" charset="-122"/>
                 <a:cs typeface="Calibri" pitchFamily="34" charset="-120"/>
               </a:rPr>
-              <a:t>Chat, Cowork, Code. Use Chat.</a:t>
+              <a:t>Chat, Cowork, Code. Start in Chat.</a:t>
             </a:r>
             <a:endParaRPr lang="en-US" sz="1100" dirty="0"/>
           </a:p>
@@ -9807,7 +9807,7 @@
                 <a:ea typeface="Calibri" pitchFamily="34" charset="-122"/>
                 <a:cs typeface="Calibri" pitchFamily="34" charset="-120"/>
               </a:rPr>
-              <a:t>Pre-set for your org. Leave it as-is.</a:t>
+              <a:t>Set to Sonnet. Switch to Opus only for the hard ones.</a:t>
             </a:r>
             <a:endParaRPr lang="en-US" sz="1100" dirty="0"/>
           </a:p>
